--- a/lectures/week-02/lecture-zh.pptx
+++ b/lectures/week-02/lecture-zh.pptx
@@ -15165,7 +15165,7 @@
                 </a:solidFill>
                 <a:latin typeface="Source Han Sans SC"/>
               </a:rPr>
-              <a:t>理论约 90 min · Lab 约 75 min · 小测与小结 15 min</a:t>
+              <a:t>理论约 90 min · Lab 80 min · 小测与小结 10 min</a:t>
             </a:r>
           </a:p>
         </p:txBody>
